--- a/Week-2/Day-5/Snowflake_Modules_4_6.pptx
+++ b/Week-2/Day-5/Snowflake_Modules_4_6.pptx
@@ -6778,7 +6778,7 @@
           <a:p>
             <a:fld id="{5BCAD085-E8A6-8845-BD4E-CB4CCA059FC4}" type="datetimeFigureOut">
               <a:rPr lang="en-US" smtClean="0"/>
-              <a:t>4/6/2026</a:t>
+              <a:t>4/9/2026</a:t>
             </a:fld>
             <a:endParaRPr lang="en-US"/>
           </a:p>
@@ -6985,7 +6985,7 @@
           <a:p>
             <a:fld id="{5BCAD085-E8A6-8845-BD4E-CB4CCA059FC4}" type="datetimeFigureOut">
               <a:rPr lang="en-US" smtClean="0"/>
-              <a:t>4/6/2026</a:t>
+              <a:t>4/9/2026</a:t>
             </a:fld>
             <a:endParaRPr lang="en-US"/>
           </a:p>
@@ -7165,7 +7165,7 @@
           <a:p>
             <a:fld id="{5BCAD085-E8A6-8845-BD4E-CB4CCA059FC4}" type="datetimeFigureOut">
               <a:rPr lang="en-US" smtClean="0"/>
-              <a:t>4/6/2026</a:t>
+              <a:t>4/9/2026</a:t>
             </a:fld>
             <a:endParaRPr lang="en-US"/>
           </a:p>
@@ -7370,7 +7370,7 @@
           <a:p>
             <a:fld id="{5BCAD085-E8A6-8845-BD4E-CB4CCA059FC4}" type="datetimeFigureOut">
               <a:rPr lang="en-US" smtClean="0"/>
-              <a:t>4/6/2026</a:t>
+              <a:t>4/9/2026</a:t>
             </a:fld>
             <a:endParaRPr lang="en-US"/>
           </a:p>
@@ -14108,7 +14108,7 @@
           <a:p>
             <a:fld id="{5BCAD085-E8A6-8845-BD4E-CB4CCA059FC4}" type="datetimeFigureOut">
               <a:rPr lang="en-US" smtClean="0"/>
-              <a:t>4/6/2026</a:t>
+              <a:t>4/9/2026</a:t>
             </a:fld>
             <a:endParaRPr lang="en-US"/>
           </a:p>
@@ -14382,7 +14382,7 @@
           <a:p>
             <a:fld id="{5BCAD085-E8A6-8845-BD4E-CB4CCA059FC4}" type="datetimeFigureOut">
               <a:rPr lang="en-US" smtClean="0"/>
-              <a:t>4/6/2026</a:t>
+              <a:t>4/9/2026</a:t>
             </a:fld>
             <a:endParaRPr lang="en-US"/>
           </a:p>
@@ -14785,7 +14785,7 @@
           <a:p>
             <a:fld id="{5BCAD085-E8A6-8845-BD4E-CB4CCA059FC4}" type="datetimeFigureOut">
               <a:rPr lang="en-US" smtClean="0"/>
-              <a:t>4/6/2026</a:t>
+              <a:t>4/9/2026</a:t>
             </a:fld>
             <a:endParaRPr lang="en-US"/>
           </a:p>
@@ -14903,7 +14903,7 @@
           <a:p>
             <a:fld id="{5BCAD085-E8A6-8845-BD4E-CB4CCA059FC4}" type="datetimeFigureOut">
               <a:rPr lang="en-US" smtClean="0"/>
-              <a:t>4/6/2026</a:t>
+              <a:t>4/9/2026</a:t>
             </a:fld>
             <a:endParaRPr lang="en-US"/>
           </a:p>
@@ -14998,7 +14998,7 @@
           <a:p>
             <a:fld id="{5BCAD085-E8A6-8845-BD4E-CB4CCA059FC4}" type="datetimeFigureOut">
               <a:rPr lang="en-US" smtClean="0"/>
-              <a:t>4/6/2026</a:t>
+              <a:t>4/9/2026</a:t>
             </a:fld>
             <a:endParaRPr lang="en-US"/>
           </a:p>
@@ -15290,7 +15290,7 @@
           <a:p>
             <a:fld id="{5BCAD085-E8A6-8845-BD4E-CB4CCA059FC4}" type="datetimeFigureOut">
               <a:rPr lang="en-US" smtClean="0"/>
-              <a:t>4/6/2026</a:t>
+              <a:t>4/9/2026</a:t>
             </a:fld>
             <a:endParaRPr lang="en-US"/>
           </a:p>
@@ -15570,7 +15570,7 @@
           <a:p>
             <a:fld id="{5BCAD085-E8A6-8845-BD4E-CB4CCA059FC4}" type="datetimeFigureOut">
               <a:rPr lang="en-US" smtClean="0"/>
-              <a:t>4/6/2026</a:t>
+              <a:t>4/9/2026</a:t>
             </a:fld>
             <a:endParaRPr lang="en-US"/>
           </a:p>
@@ -15820,7 +15820,7 @@
           <a:p>
             <a:fld id="{5BCAD085-E8A6-8845-BD4E-CB4CCA059FC4}" type="datetimeFigureOut">
               <a:rPr lang="en-US" smtClean="0"/>
-              <a:t>4/6/2026</a:t>
+              <a:t>4/9/2026</a:t>
             </a:fld>
             <a:endParaRPr lang="en-US"/>
           </a:p>
@@ -16486,7 +16486,8 @@
           <a:lstStyle/>
           <a:p>
             <a:r>
-              <a:t>Module 5 — Continuous &amp; Advanced Loading</a:t>
+              <a:rPr dirty="0"/>
+              <a:t>Continuous &amp; Advanced Loading</a:t>
             </a:r>
           </a:p>
         </p:txBody>
@@ -16871,7 +16872,11 @@
           <a:lstStyle/>
           <a:p>
             <a:r>
-              <a:t>Module 6 — Data Processing &amp; SQL</a:t>
+              <a:t>Data </a:t>
+            </a:r>
+            <a:r>
+              <a:rPr dirty="0"/>
+              <a:t>Processing &amp; SQL</a:t>
             </a:r>
           </a:p>
         </p:txBody>
